--- a/Schools_ML_Track/camp_2026/slides/DA/DA21.pptx
+++ b/Schools_ML_Track/camp_2026/slides/DA/DA21.pptx
@@ -118,7 +118,7 @@
   <p:extLst>
     <p:ext uri="{521415D9-36F7-43E2-AB2F-B90AF26B5E84}">
       <p14:sectionLst xmlns:p14="http://schemas.microsoft.com/office/powerpoint/2010/main">
-        <p14:section name="Opening" id="{a3ec4c36-22b2-7840-45b5-2f10b7e298f0}">
+        <p14:section name="Opening" id="{b3655b61-0f04-6215-53cf-1f0667715ac3}">
           <p14:sldIdLst>
             <p14:sldId id="256"/>
             <p14:sldId id="257"/>
@@ -130,7 +130,7 @@
             <p14:sldId id="263"/>
           </p14:sldIdLst>
         </p14:section>
-        <p14:section name="Make and close" id="{c53ae628-9507-3bc2-1fb9-4e9d31b54f88}">
+        <p14:section name="Make and close" id="{8b315fc2-bcf2-0d69-244e-fc2e671e8a0b}">
           <p14:sldIdLst>
             <p14:sldId id="264"/>
             <p14:sldId id="265"/>

--- a/Schools_ML_Track/camp_2026/slides/DA/DA21.pptx
+++ b/Schools_ML_Track/camp_2026/slides/DA/DA21.pptx
@@ -118,7 +118,7 @@
   <p:extLst>
     <p:ext uri="{521415D9-36F7-43E2-AB2F-B90AF26B5E84}">
       <p14:sectionLst xmlns:p14="http://schemas.microsoft.com/office/powerpoint/2010/main">
-        <p14:section name="Opening" id="{b3655b61-0f04-6215-53cf-1f0667715ac3}">
+        <p14:section name="Opening" id="{caf1ac1c-cf5a-d11a-ccfb-16109fac8f70}">
           <p14:sldIdLst>
             <p14:sldId id="256"/>
             <p14:sldId id="257"/>
@@ -130,7 +130,7 @@
             <p14:sldId id="263"/>
           </p14:sldIdLst>
         </p14:section>
-        <p14:section name="Make and close" id="{8b315fc2-bcf2-0d69-244e-fc2e671e8a0b}">
+        <p14:section name="Make and close" id="{ef934ecf-4d45-ef0d-2e53-a758a0a80696}">
           <p14:sldIdLst>
             <p14:sldId id="264"/>
             <p14:sldId id="265"/>
@@ -2461,15 +2461,15 @@
           <a:p>
             <a:pPr algn="l" indent="0" marL="0">
               <a:lnSpc>
-                <a:spcPts val="3000"/>
+                <a:spcPts val="2760"/>
               </a:lnSpc>
               <a:spcAft>
-                <a:spcPts val="2520"/>
+                <a:spcPts val="2020"/>
               </a:spcAft>
               <a:buNone/>
             </a:pPr>
             <a:r>
-              <a:rPr lang="en-US" sz="2500" dirty="0">
+              <a:rPr lang="en-US" sz="2300" dirty="0">
                 <a:solidFill>
                   <a:srgbClr val="111111"/>
                 </a:solidFill>
@@ -2477,22 +2477,22 @@
                 <a:ea typeface="Lato" pitchFamily="34" charset="-122"/>
                 <a:cs typeface="Lato" pitchFamily="34" charset="-120"/>
               </a:rPr>
-              <a:t>To put a chart in your report, call plt.savefig("revenue.png", bbox_inches="tight") before plt.show(), then insert the PNG with Insert and Pictures. When the instructor confirms you are ready, spend 20 minutes with AI_CODING_ASSISTANTS_LAB.md: critique a hint on the practice function, run a test and log it in AI_USE_LOG.md.</a:t>
-            </a:r>
-            <a:endParaRPr lang="en-US" sz="2500" dirty="0"/>
+              <a:t>To put a chart in your report, call plt.savefig("revenue.png", bbox_inches="tight") before plt.show(), then insert the PNG with Insert and Pictures.</a:t>
+            </a:r>
+            <a:endParaRPr lang="en-US" sz="2300" dirty="0"/>
           </a:p>
           <a:p>
             <a:pPr algn="l" indent="0" marL="0">
               <a:lnSpc>
-                <a:spcPts val="3000"/>
+                <a:spcPts val="2760"/>
               </a:lnSpc>
               <a:spcAft>
-                <a:spcPts val="2520"/>
+                <a:spcPts val="2020"/>
               </a:spcAft>
               <a:buNone/>
             </a:pPr>
             <a:r>
-              <a:rPr lang="en-US" sz="2500" dirty="0">
+              <a:rPr lang="en-US" sz="2300" dirty="0">
                 <a:solidFill>
                   <a:srgbClr val="111111"/>
                 </a:solidFill>
@@ -2500,9 +2500,32 @@
                 <a:ea typeface="Lato" pitchFamily="34" charset="-122"/>
                 <a:cs typeface="Lato" pitchFamily="34" charset="-120"/>
               </a:rPr>
-              <a:t>Save it as DA21. Write two sentences: what you changed and how you checked it.</a:t>
-            </a:r>
-            <a:endParaRPr lang="en-US" sz="2500" dirty="0"/>
+              <a:t>When the instructor confirms you are ready, spend 20 minutes with AI_CODING_ASSISTANTS_LAB.md: critique a hint on the practice function, run a test and log it in AI_USE_LOG.md.</a:t>
+            </a:r>
+            <a:endParaRPr lang="en-US" sz="2300" dirty="0"/>
+          </a:p>
+          <a:p>
+            <a:pPr algn="l" indent="0" marL="0">
+              <a:lnSpc>
+                <a:spcPts val="2760"/>
+              </a:lnSpc>
+              <a:spcAft>
+                <a:spcPts val="2020"/>
+              </a:spcAft>
+              <a:buNone/>
+            </a:pPr>
+            <a:r>
+              <a:rPr lang="en-US" sz="2300" dirty="0">
+                <a:solidFill>
+                  <a:srgbClr val="111111"/>
+                </a:solidFill>
+                <a:latin typeface="Lato" pitchFamily="34" charset="0"/>
+                <a:ea typeface="Lato" pitchFamily="34" charset="-122"/>
+                <a:cs typeface="Lato" pitchFamily="34" charset="-120"/>
+              </a:rPr>
+              <a:t>Write two sentences: what you changed and how you checked it.</a:t>
+            </a:r>
+            <a:endParaRPr lang="en-US" sz="2300" dirty="0"/>
           </a:p>
         </p:txBody>
       </p:sp>
@@ -5163,15 +5186,15 @@
           <a:p>
             <a:pPr algn="l" indent="0" marL="0">
               <a:lnSpc>
-                <a:spcPts val="3600"/>
+                <a:spcPts val="3120"/>
               </a:lnSpc>
               <a:spcAft>
-                <a:spcPts val="2520"/>
+                <a:spcPts val="2020"/>
               </a:spcAft>
               <a:buNone/>
             </a:pPr>
             <a:r>
-              <a:rPr lang="en-US" sz="3000" dirty="0">
+              <a:rPr lang="en-US" sz="2600" dirty="0">
                 <a:solidFill>
                   <a:srgbClr val="111111"/>
                 </a:solidFill>
@@ -5179,9 +5202,78 @@
                 <a:ea typeface="Lato" pitchFamily="34" charset="-122"/>
                 <a:cs typeface="Lato" pitchFamily="34" charset="-120"/>
               </a:rPr>
-              <a:t>Build the chart report. Use few charts, readable labels with units, the covered dates and a visible data source note. Write two findings and one limitation next to their evidence. Give a peer 30 seconds to find the largest category and its total, and record where they hesitate.</a:t>
-            </a:r>
-            <a:endParaRPr lang="en-US" sz="3000" dirty="0"/>
+              <a:t>Build the chart report.</a:t>
+            </a:r>
+            <a:endParaRPr lang="en-US" sz="2600" dirty="0"/>
+          </a:p>
+          <a:p>
+            <a:pPr algn="l" indent="0" marL="0">
+              <a:lnSpc>
+                <a:spcPts val="3120"/>
+              </a:lnSpc>
+              <a:spcAft>
+                <a:spcPts val="2020"/>
+              </a:spcAft>
+              <a:buNone/>
+            </a:pPr>
+            <a:r>
+              <a:rPr lang="en-US" sz="2600" dirty="0">
+                <a:solidFill>
+                  <a:srgbClr val="111111"/>
+                </a:solidFill>
+                <a:latin typeface="Lato" pitchFamily="34" charset="0"/>
+                <a:ea typeface="Lato" pitchFamily="34" charset="-122"/>
+                <a:cs typeface="Lato" pitchFamily="34" charset="-120"/>
+              </a:rPr>
+              <a:t>Use few charts, readable labels with units, the covered dates and a visible data source note.</a:t>
+            </a:r>
+            <a:endParaRPr lang="en-US" sz="2600" dirty="0"/>
+          </a:p>
+          <a:p>
+            <a:pPr algn="l" indent="0" marL="0">
+              <a:lnSpc>
+                <a:spcPts val="3120"/>
+              </a:lnSpc>
+              <a:spcAft>
+                <a:spcPts val="2020"/>
+              </a:spcAft>
+              <a:buNone/>
+            </a:pPr>
+            <a:r>
+              <a:rPr lang="en-US" sz="2600" dirty="0">
+                <a:solidFill>
+                  <a:srgbClr val="111111"/>
+                </a:solidFill>
+                <a:latin typeface="Lato" pitchFamily="34" charset="0"/>
+                <a:ea typeface="Lato" pitchFamily="34" charset="-122"/>
+                <a:cs typeface="Lato" pitchFamily="34" charset="-120"/>
+              </a:rPr>
+              <a:t>Write two findings and one limitation next to their evidence.</a:t>
+            </a:r>
+            <a:endParaRPr lang="en-US" sz="2600" dirty="0"/>
+          </a:p>
+          <a:p>
+            <a:pPr algn="l" indent="0" marL="0">
+              <a:lnSpc>
+                <a:spcPts val="3120"/>
+              </a:lnSpc>
+              <a:spcAft>
+                <a:spcPts val="2020"/>
+              </a:spcAft>
+              <a:buNone/>
+            </a:pPr>
+            <a:r>
+              <a:rPr lang="en-US" sz="2600" dirty="0">
+                <a:solidFill>
+                  <a:srgbClr val="111111"/>
+                </a:solidFill>
+                <a:latin typeface="Lato" pitchFamily="34" charset="0"/>
+                <a:ea typeface="Lato" pitchFamily="34" charset="-122"/>
+                <a:cs typeface="Lato" pitchFamily="34" charset="-120"/>
+              </a:rPr>
+              <a:t>Give a peer 30 seconds to find the largest category and its total, and record where they hesitate.</a:t>
+            </a:r>
+            <a:endParaRPr lang="en-US" sz="2600" dirty="0"/>
           </a:p>
         </p:txBody>
       </p:sp>
